--- a/Quickbites Analysis.pptx
+++ b/Quickbites Analysis.pptx
@@ -5,7 +5,7 @@
     <p:sldMasterId id="2147483648" r:id="rId1"/>
   </p:sldMasterIdLst>
   <p:notesMasterIdLst>
-    <p:notesMasterId r:id="rId13"/>
+    <p:notesMasterId r:id="rId12"/>
   </p:notesMasterIdLst>
   <p:sldIdLst>
     <p:sldId id="256" r:id="rId2"/>
@@ -18,7 +18,6 @@
     <p:sldId id="263" r:id="rId9"/>
     <p:sldId id="264" r:id="rId10"/>
     <p:sldId id="265" r:id="rId11"/>
-    <p:sldId id="266" r:id="rId12"/>
   </p:sldIdLst>
   <p:sldSz cx="9144000" cy="5143500" type="screen16x9"/>
   <p:notesSz cx="5143500" cy="9144000"/>
@@ -397,90 +396,6 @@
             <a:fld id="{F7021451-1387-4CA6-816F-3879F97B5CBC}" type="slidenum">
               <a:rPr lang="en-US"/>
               <a:t>10</a:t>
-            </a:fld>
-            <a:endParaRPr lang="en-US"/>
-          </a:p>
-        </p:txBody>
-      </p:sp>
-    </p:spTree>
-    <p:extLst>
-      <p:ext uri="{BB962C8B-B14F-4D97-AF65-F5344CB8AC3E}">
-        <p14:creationId xmlns:p14="http://schemas.microsoft.com/office/powerpoint/2010/main" val="1024086991"/>
-      </p:ext>
-    </p:extLst>
-  </p:cSld>
-  <p:clrMapOvr>
-    <a:masterClrMapping/>
-  </p:clrMapOvr>
-</p:notes>
-</file>
-
-<file path=ppt/notesSlides/notesSlide11.xml><?xml version="1.0" encoding="utf-8"?>
-<p:notes xmlns:a="http://schemas.openxmlformats.org/drawingml/2006/main" xmlns:r="http://schemas.openxmlformats.org/officeDocument/2006/relationships" xmlns:p="http://schemas.openxmlformats.org/presentationml/2006/main">
-  <p:cSld>
-    <p:spTree>
-      <p:nvGrpSpPr>
-        <p:cNvPr id="1" name=""/>
-        <p:cNvGrpSpPr/>
-        <p:nvPr/>
-      </p:nvGrpSpPr>
-      <p:grpSpPr>
-        <a:xfrm>
-          <a:off x="0" y="0"/>
-          <a:ext cx="0" cy="0"/>
-          <a:chOff x="0" y="0"/>
-          <a:chExt cx="0" cy="0"/>
-        </a:xfrm>
-      </p:grpSpPr>
-      <p:sp>
-        <p:nvSpPr>
-          <p:cNvPr id="2" name="Slide Image Placeholder 1"/>
-          <p:cNvSpPr>
-            <a:spLocks noGrp="1" noRot="1" noChangeAspect="1"/>
-          </p:cNvSpPr>
-          <p:nvPr>
-            <p:ph type="sldImg"/>
-          </p:nvPr>
-        </p:nvSpPr>
-        <p:spPr/>
-      </p:sp>
-      <p:sp>
-        <p:nvSpPr>
-          <p:cNvPr id="3" name="Notes Placeholder 2"/>
-          <p:cNvSpPr>
-            <a:spLocks noGrp="1"/>
-          </p:cNvSpPr>
-          <p:nvPr>
-            <p:ph type="body" idx="1"/>
-          </p:nvPr>
-        </p:nvSpPr>
-        <p:spPr/>
-        <p:txBody>
-          <a:bodyPr/>
-          <a:lstStyle/>
-          <a:p>
-            <a:endParaRPr lang="en-US" dirty="0"/>
-          </a:p>
-        </p:txBody>
-      </p:sp>
-      <p:sp>
-        <p:nvSpPr>
-          <p:cNvPr id="4" name="Slide Number Placeholder 3"/>
-          <p:cNvSpPr>
-            <a:spLocks noGrp="1"/>
-          </p:cNvSpPr>
-          <p:nvPr>
-            <p:ph type="sldNum" sz="quarter" idx="10"/>
-          </p:nvPr>
-        </p:nvSpPr>
-        <p:spPr/>
-        <p:txBody>
-          <a:bodyPr/>
-          <a:lstStyle/>
-          <a:p>
-            <a:fld id="{F7021451-1387-4CA6-816F-3879F97B5CBC}" type="slidenum">
-              <a:rPr lang="en-US"/>
-              <a:t>11</a:t>
             </a:fld>
             <a:endParaRPr lang="en-US"/>
           </a:p>
@@ -1852,14 +1767,11 @@
             </a:pPr>
             <a:r>
               <a:rPr lang="en-US" sz="1400" b="1" dirty="0">
-                <a:solidFill>
-                  <a:srgbClr val="B85042"/>
-                </a:solidFill>
                 <a:latin typeface="Calibri" pitchFamily="34" charset="0"/>
                 <a:ea typeface="Calibri" pitchFamily="34" charset="-122"/>
                 <a:cs typeface="Calibri" pitchFamily="34" charset="-120"/>
               </a:rPr>
-              <a:t>Rain reduces orders by ~27% and increases delivery times by ~30% across all locations</a:t>
+              <a:t>Rain reduces orders by 27% and increases delivery times by 30% across all locations</a:t>
             </a:r>
             <a:endParaRPr lang="en-US" sz="1400" dirty="0"/>
           </a:p>
@@ -2301,7 +2213,7 @@
             <a:avLst/>
           </a:prstGeom>
           <a:solidFill>
-            <a:srgbClr val="4A9E6B"/>
+            <a:srgbClr val="B85042"/>
           </a:solidFill>
           <a:ln/>
         </p:spPr>
@@ -2425,7 +2337,7 @@
                 <a:ea typeface="Calibri" pitchFamily="34" charset="-122"/>
                 <a:cs typeface="Calibri" pitchFamily="34" charset="-120"/>
               </a:rPr>
-              <a:t>Run "rainy day" promotions triggered by weather forecasts to offset the ~27% order drop</a:t>
+              <a:t>Run "rainy day" promotions triggered by weather forecasts to offset the 27% order drop</a:t>
             </a:r>
             <a:endParaRPr lang="en-US" sz="1100" dirty="0"/>
           </a:p>
@@ -2462,752 +2374,6 @@
                 <a:cs typeface="Calibri" pitchFamily="34" charset="-120"/>
               </a:rPr>
               <a:t>Consider dynamic delivery fees on rainy days to cover increased delivery costs</a:t>
-            </a:r>
-            <a:endParaRPr lang="en-US" sz="1100" dirty="0"/>
-          </a:p>
-        </p:txBody>
-      </p:sp>
-    </p:spTree>
-  </p:cSld>
-  <p:clrMapOvr>
-    <a:masterClrMapping/>
-  </p:clrMapOvr>
-</p:sld>
-</file>
-
-<file path=ppt/slides/slide11.xml><?xml version="1.0" encoding="utf-8"?>
-<p:sld xmlns:a="http://schemas.openxmlformats.org/drawingml/2006/main" xmlns:r="http://schemas.openxmlformats.org/officeDocument/2006/relationships" xmlns:p="http://schemas.openxmlformats.org/presentationml/2006/main">
-  <p:cSld name="Slide 11">
-    <p:bg>
-      <p:bgPr>
-        <a:solidFill>
-          <a:srgbClr val="3B2F2F"/>
-        </a:solidFill>
-        <a:effectLst/>
-      </p:bgPr>
-    </p:bg>
-    <p:spTree>
-      <p:nvGrpSpPr>
-        <p:cNvPr id="1" name=""/>
-        <p:cNvGrpSpPr/>
-        <p:nvPr/>
-      </p:nvGrpSpPr>
-      <p:grpSpPr>
-        <a:xfrm>
-          <a:off x="0" y="0"/>
-          <a:ext cx="0" cy="0"/>
-          <a:chOff x="0" y="0"/>
-          <a:chExt cx="0" cy="0"/>
-        </a:xfrm>
-      </p:grpSpPr>
-      <p:sp>
-        <p:nvSpPr>
-          <p:cNvPr id="2" name="Shape 0"/>
-          <p:cNvSpPr/>
-          <p:nvPr/>
-        </p:nvSpPr>
-        <p:spPr>
-          <a:xfrm>
-            <a:off x="0" y="0"/>
-            <a:ext cx="137160" cy="5143500"/>
-          </a:xfrm>
-          <a:prstGeom prst="rect">
-            <a:avLst/>
-          </a:prstGeom>
-          <a:solidFill>
-            <a:srgbClr val="B85042"/>
-          </a:solidFill>
-          <a:ln/>
-        </p:spPr>
-        <p:txBody>
-          <a:bodyPr/>
-          <a:lstStyle/>
-          <a:p>
-            <a:endParaRPr lang="en-KE"/>
-          </a:p>
-        </p:txBody>
-      </p:sp>
-      <p:sp>
-        <p:nvSpPr>
-          <p:cNvPr id="3" name="Text 1"/>
-          <p:cNvSpPr/>
-          <p:nvPr/>
-        </p:nvSpPr>
-        <p:spPr>
-          <a:xfrm>
-            <a:off x="548640" y="274320"/>
-            <a:ext cx="7315200" cy="640080"/>
-          </a:xfrm>
-          <a:prstGeom prst="rect">
-            <a:avLst/>
-          </a:prstGeom>
-          <a:noFill/>
-          <a:ln/>
-        </p:spPr>
-        <p:txBody>
-          <a:bodyPr wrap="square" lIns="0" tIns="0" rIns="0" bIns="0" rtlCol="0" anchor="ctr"/>
-          <a:lstStyle/>
-          <a:p>
-            <a:pPr marL="0" indent="0">
-              <a:buNone/>
-            </a:pPr>
-            <a:r>
-              <a:rPr lang="en-US" sz="3200" b="1" dirty="0">
-                <a:solidFill>
-                  <a:srgbClr val="FFFFFF"/>
-                </a:solidFill>
-                <a:latin typeface="Georgia" pitchFamily="34" charset="0"/>
-                <a:ea typeface="Georgia" pitchFamily="34" charset="-122"/>
-                <a:cs typeface="Georgia" pitchFamily="34" charset="-120"/>
-              </a:rPr>
-              <a:t>Limitations &amp; Next Steps</a:t>
-            </a:r>
-            <a:endParaRPr lang="en-US" sz="3200" dirty="0"/>
-          </a:p>
-        </p:txBody>
-      </p:sp>
-      <p:sp>
-        <p:nvSpPr>
-          <p:cNvPr id="4" name="Text 2"/>
-          <p:cNvSpPr/>
-          <p:nvPr/>
-        </p:nvSpPr>
-        <p:spPr>
-          <a:xfrm>
-            <a:off x="548640" y="1097280"/>
-            <a:ext cx="3657600" cy="365760"/>
-          </a:xfrm>
-          <a:prstGeom prst="rect">
-            <a:avLst/>
-          </a:prstGeom>
-          <a:noFill/>
-          <a:ln/>
-        </p:spPr>
-        <p:txBody>
-          <a:bodyPr wrap="square" lIns="0" tIns="0" rIns="0" bIns="0" rtlCol="0" anchor="ctr"/>
-          <a:lstStyle/>
-          <a:p>
-            <a:pPr marL="0" indent="0">
-              <a:buNone/>
-            </a:pPr>
-            <a:r>
-              <a:rPr lang="en-US" sz="1600" b="1" dirty="0">
-                <a:solidFill>
-                  <a:srgbClr val="A7BEAE"/>
-                </a:solidFill>
-                <a:latin typeface="Georgia" pitchFamily="34" charset="0"/>
-                <a:ea typeface="Georgia" pitchFamily="34" charset="-122"/>
-                <a:cs typeface="Georgia" pitchFamily="34" charset="-120"/>
-              </a:rPr>
-              <a:t>What We Don't Know</a:t>
-            </a:r>
-            <a:endParaRPr lang="en-US" sz="1600" dirty="0"/>
-          </a:p>
-        </p:txBody>
-      </p:sp>
-      <p:sp>
-        <p:nvSpPr>
-          <p:cNvPr id="5" name="Text 3"/>
-          <p:cNvSpPr/>
-          <p:nvPr/>
-        </p:nvSpPr>
-        <p:spPr>
-          <a:xfrm>
-            <a:off x="548640" y="1508760"/>
-            <a:ext cx="3840480" cy="1371600"/>
-          </a:xfrm>
-          <a:prstGeom prst="rect">
-            <a:avLst/>
-          </a:prstGeom>
-          <a:noFill/>
-          <a:ln/>
-        </p:spPr>
-        <p:txBody>
-          <a:bodyPr wrap="square" lIns="0" tIns="0" rIns="0" bIns="0" rtlCol="0" anchor="ctr"/>
-          <a:lstStyle/>
-          <a:p>
-            <a:pPr marL="342900" indent="-342900">
-              <a:buSzPct val="100000"/>
-              <a:buChar char="•"/>
-            </a:pPr>
-            <a:r>
-              <a:rPr lang="en-US" sz="1100" dirty="0">
-                <a:solidFill>
-                  <a:srgbClr val="CCCCCC"/>
-                </a:solidFill>
-                <a:latin typeface="Calibri" pitchFamily="34" charset="0"/>
-                <a:ea typeface="Calibri" pitchFamily="34" charset="-122"/>
-                <a:cs typeface="Calibri" pitchFamily="34" charset="-120"/>
-              </a:rPr>
-              <a:t>No customer-level data — can't distinguish new vs repeat customers</a:t>
-            </a:r>
-            <a:endParaRPr lang="en-US" sz="1100" dirty="0"/>
-          </a:p>
-          <a:p>
-            <a:pPr marL="342900" indent="-342900">
-              <a:buSzPct val="100000"/>
-              <a:buChar char="•"/>
-            </a:pPr>
-            <a:r>
-              <a:rPr lang="en-US" sz="1100" dirty="0">
-                <a:solidFill>
-                  <a:srgbClr val="CCCCCC"/>
-                </a:solidFill>
-                <a:latin typeface="Calibri" pitchFamily="34" charset="0"/>
-                <a:ea typeface="Calibri" pitchFamily="34" charset="-122"/>
-                <a:cs typeface="Calibri" pitchFamily="34" charset="-120"/>
-              </a:rPr>
-              <a:t>No marketing spend data per location</a:t>
-            </a:r>
-            <a:endParaRPr lang="en-US" sz="1100" dirty="0"/>
-          </a:p>
-          <a:p>
-            <a:pPr marL="342900" indent="-342900">
-              <a:buSzPct val="100000"/>
-              <a:buChar char="•"/>
-            </a:pPr>
-            <a:r>
-              <a:rPr lang="en-US" sz="1100" dirty="0">
-                <a:solidFill>
-                  <a:srgbClr val="CCCCCC"/>
-                </a:solidFill>
-                <a:latin typeface="Calibri" pitchFamily="34" charset="0"/>
-                <a:ea typeface="Calibri" pitchFamily="34" charset="-122"/>
-                <a:cs typeface="Calibri" pitchFamily="34" charset="-120"/>
-              </a:rPr>
-              <a:t>Only 3 locations over 6 months — small sample</a:t>
-            </a:r>
-            <a:endParaRPr lang="en-US" sz="1100" dirty="0"/>
-          </a:p>
-          <a:p>
-            <a:pPr marL="342900" indent="-342900">
-              <a:buSzPct val="100000"/>
-              <a:buChar char="•"/>
-            </a:pPr>
-            <a:r>
-              <a:rPr lang="en-US" sz="1100" dirty="0">
-                <a:solidFill>
-                  <a:srgbClr val="CCCCCC"/>
-                </a:solidFill>
-                <a:latin typeface="Calibri" pitchFamily="34" charset="0"/>
-                <a:ea typeface="Calibri" pitchFamily="34" charset="-122"/>
-                <a:cs typeface="Calibri" pitchFamily="34" charset="-120"/>
-              </a:rPr>
-              <a:t>No data on why items are ordered (preferences vs availability)</a:t>
-            </a:r>
-            <a:endParaRPr lang="en-US" sz="1100" dirty="0"/>
-          </a:p>
-        </p:txBody>
-      </p:sp>
-      <p:sp>
-        <p:nvSpPr>
-          <p:cNvPr id="6" name="Text 4"/>
-          <p:cNvSpPr/>
-          <p:nvPr/>
-        </p:nvSpPr>
-        <p:spPr>
-          <a:xfrm>
-            <a:off x="4754880" y="1097280"/>
-            <a:ext cx="4114800" cy="365760"/>
-          </a:xfrm>
-          <a:prstGeom prst="rect">
-            <a:avLst/>
-          </a:prstGeom>
-          <a:noFill/>
-          <a:ln/>
-        </p:spPr>
-        <p:txBody>
-          <a:bodyPr wrap="square" lIns="0" tIns="0" rIns="0" bIns="0" rtlCol="0" anchor="ctr"/>
-          <a:lstStyle/>
-          <a:p>
-            <a:pPr marL="0" indent="0">
-              <a:buNone/>
-            </a:pPr>
-            <a:r>
-              <a:rPr lang="en-US" sz="1600" b="1" dirty="0">
-                <a:solidFill>
-                  <a:srgbClr val="A7BEAE"/>
-                </a:solidFill>
-                <a:latin typeface="Georgia" pitchFamily="34" charset="0"/>
-                <a:ea typeface="Georgia" pitchFamily="34" charset="-122"/>
-                <a:cs typeface="Georgia" pitchFamily="34" charset="-120"/>
-              </a:rPr>
-              <a:t>What to Investigate Next</a:t>
-            </a:r>
-            <a:endParaRPr lang="en-US" sz="1600" dirty="0"/>
-          </a:p>
-        </p:txBody>
-      </p:sp>
-      <p:sp>
-        <p:nvSpPr>
-          <p:cNvPr id="7" name="Text 5"/>
-          <p:cNvSpPr/>
-          <p:nvPr/>
-        </p:nvSpPr>
-        <p:spPr>
-          <a:xfrm>
-            <a:off x="4754880" y="1508760"/>
-            <a:ext cx="4114800" cy="1371600"/>
-          </a:xfrm>
-          <a:prstGeom prst="rect">
-            <a:avLst/>
-          </a:prstGeom>
-          <a:noFill/>
-          <a:ln/>
-        </p:spPr>
-        <p:txBody>
-          <a:bodyPr wrap="square" lIns="0" tIns="0" rIns="0" bIns="0" rtlCol="0" anchor="ctr"/>
-          <a:lstStyle/>
-          <a:p>
-            <a:pPr marL="342900" indent="-342900">
-              <a:buSzPct val="100000"/>
-              <a:buChar char="•"/>
-            </a:pPr>
-            <a:r>
-              <a:rPr lang="en-US" sz="1100" dirty="0">
-                <a:solidFill>
-                  <a:srgbClr val="CCCCCC"/>
-                </a:solidFill>
-                <a:latin typeface="Calibri" pitchFamily="34" charset="0"/>
-                <a:ea typeface="Calibri" pitchFamily="34" charset="-122"/>
-                <a:cs typeface="Calibri" pitchFamily="34" charset="-120"/>
-              </a:rPr>
-              <a:t>Customer retention and repeat order rates per location</a:t>
-            </a:r>
-            <a:endParaRPr lang="en-US" sz="1100" dirty="0"/>
-          </a:p>
-          <a:p>
-            <a:pPr marL="342900" indent="-342900">
-              <a:buSzPct val="100000"/>
-              <a:buChar char="•"/>
-            </a:pPr>
-            <a:r>
-              <a:rPr lang="en-US" sz="1100" dirty="0">
-                <a:solidFill>
-                  <a:srgbClr val="CCCCCC"/>
-                </a:solidFill>
-                <a:latin typeface="Calibri" pitchFamily="34" charset="0"/>
-                <a:ea typeface="Calibri" pitchFamily="34" charset="-122"/>
-                <a:cs typeface="Calibri" pitchFamily="34" charset="-120"/>
-              </a:rPr>
-              <a:t>Nairobi neighborhoods matching Eastleigh's expansion profile</a:t>
-            </a:r>
-            <a:endParaRPr lang="en-US" sz="1100" dirty="0"/>
-          </a:p>
-          <a:p>
-            <a:pPr marL="342900" indent="-342900">
-              <a:buSzPct val="100000"/>
-              <a:buChar char="•"/>
-            </a:pPr>
-            <a:r>
-              <a:rPr lang="en-US" sz="1100" dirty="0">
-                <a:solidFill>
-                  <a:srgbClr val="CCCCCC"/>
-                </a:solidFill>
-                <a:latin typeface="Calibri" pitchFamily="34" charset="0"/>
-                <a:ea typeface="Calibri" pitchFamily="34" charset="-122"/>
-                <a:cs typeface="Calibri" pitchFamily="34" charset="-120"/>
-              </a:rPr>
-              <a:t>A/B test menu removals before permanent changes</a:t>
-            </a:r>
-            <a:endParaRPr lang="en-US" sz="1100" dirty="0"/>
-          </a:p>
-          <a:p>
-            <a:pPr marL="342900" indent="-342900">
-              <a:buSzPct val="100000"/>
-              <a:buChar char="•"/>
-            </a:pPr>
-            <a:r>
-              <a:rPr lang="en-US" sz="1100" dirty="0">
-                <a:solidFill>
-                  <a:srgbClr val="CCCCCC"/>
-                </a:solidFill>
-                <a:latin typeface="Calibri" pitchFamily="34" charset="0"/>
-                <a:ea typeface="Calibri" pitchFamily="34" charset="-122"/>
-                <a:cs typeface="Calibri" pitchFamily="34" charset="-120"/>
-              </a:rPr>
-              <a:t>Peak hour staffing optimization using order time data</a:t>
-            </a:r>
-            <a:endParaRPr lang="en-US" sz="1100" dirty="0"/>
-          </a:p>
-        </p:txBody>
-      </p:sp>
-      <p:sp>
-        <p:nvSpPr>
-          <p:cNvPr id="8" name="Shape 6"/>
-          <p:cNvSpPr/>
-          <p:nvPr/>
-        </p:nvSpPr>
-        <p:spPr>
-          <a:xfrm>
-            <a:off x="548640" y="3291840"/>
-            <a:ext cx="8046720" cy="36576"/>
-          </a:xfrm>
-          <a:prstGeom prst="rect">
-            <a:avLst/>
-          </a:prstGeom>
-          <a:solidFill>
-            <a:srgbClr val="B85042"/>
-          </a:solidFill>
-          <a:ln/>
-        </p:spPr>
-        <p:txBody>
-          <a:bodyPr/>
-          <a:lstStyle/>
-          <a:p>
-            <a:endParaRPr lang="en-KE"/>
-          </a:p>
-        </p:txBody>
-      </p:sp>
-      <p:sp>
-        <p:nvSpPr>
-          <p:cNvPr id="9" name="Text 7"/>
-          <p:cNvSpPr/>
-          <p:nvPr/>
-        </p:nvSpPr>
-        <p:spPr>
-          <a:xfrm>
-            <a:off x="548640" y="3520440"/>
-            <a:ext cx="7315200" cy="365760"/>
-          </a:xfrm>
-          <a:prstGeom prst="rect">
-            <a:avLst/>
-          </a:prstGeom>
-          <a:noFill/>
-          <a:ln/>
-        </p:spPr>
-        <p:txBody>
-          <a:bodyPr wrap="square" lIns="0" tIns="0" rIns="0" bIns="0" rtlCol="0" anchor="ctr"/>
-          <a:lstStyle/>
-          <a:p>
-            <a:pPr marL="0" indent="0">
-              <a:buNone/>
-            </a:pPr>
-            <a:r>
-              <a:rPr lang="en-US" sz="1800" b="1" dirty="0">
-                <a:solidFill>
-                  <a:srgbClr val="FFFFFF"/>
-                </a:solidFill>
-                <a:latin typeface="Georgia" pitchFamily="34" charset="0"/>
-                <a:ea typeface="Georgia" pitchFamily="34" charset="-122"/>
-                <a:cs typeface="Georgia" pitchFamily="34" charset="-120"/>
-              </a:rPr>
-              <a:t>Key Takeaways</a:t>
-            </a:r>
-            <a:endParaRPr lang="en-US" sz="1800" dirty="0"/>
-          </a:p>
-        </p:txBody>
-      </p:sp>
-      <p:sp>
-        <p:nvSpPr>
-          <p:cNvPr id="10" name="Shape 8"/>
-          <p:cNvSpPr/>
-          <p:nvPr/>
-        </p:nvSpPr>
-        <p:spPr>
-          <a:xfrm>
-            <a:off x="548640" y="4023360"/>
-            <a:ext cx="411480" cy="411480"/>
-          </a:xfrm>
-          <a:prstGeom prst="ellipse">
-            <a:avLst/>
-          </a:prstGeom>
-          <a:solidFill>
-            <a:srgbClr val="B85042"/>
-          </a:solidFill>
-          <a:ln/>
-        </p:spPr>
-        <p:txBody>
-          <a:bodyPr/>
-          <a:lstStyle/>
-          <a:p>
-            <a:endParaRPr lang="en-KE"/>
-          </a:p>
-        </p:txBody>
-      </p:sp>
-      <p:sp>
-        <p:nvSpPr>
-          <p:cNvPr id="11" name="Text 9"/>
-          <p:cNvSpPr/>
-          <p:nvPr/>
-        </p:nvSpPr>
-        <p:spPr>
-          <a:xfrm>
-            <a:off x="548640" y="4023360"/>
-            <a:ext cx="411480" cy="411480"/>
-          </a:xfrm>
-          <a:prstGeom prst="rect">
-            <a:avLst/>
-          </a:prstGeom>
-          <a:noFill/>
-          <a:ln/>
-        </p:spPr>
-        <p:txBody>
-          <a:bodyPr wrap="square" lIns="0" tIns="0" rIns="0" bIns="0" rtlCol="0" anchor="ctr"/>
-          <a:lstStyle/>
-          <a:p>
-            <a:pPr marL="0" indent="0" algn="ctr">
-              <a:buNone/>
-            </a:pPr>
-            <a:r>
-              <a:rPr lang="en-US" sz="1600" b="1" dirty="0">
-                <a:solidFill>
-                  <a:srgbClr val="FFFFFF"/>
-                </a:solidFill>
-                <a:latin typeface="Georgia" pitchFamily="34" charset="0"/>
-                <a:ea typeface="Georgia" pitchFamily="34" charset="-122"/>
-                <a:cs typeface="Georgia" pitchFamily="34" charset="-120"/>
-              </a:rPr>
-              <a:t>1</a:t>
-            </a:r>
-            <a:endParaRPr lang="en-US" sz="1600" dirty="0"/>
-          </a:p>
-        </p:txBody>
-      </p:sp>
-      <p:sp>
-        <p:nvSpPr>
-          <p:cNvPr id="12" name="Text 10"/>
-          <p:cNvSpPr/>
-          <p:nvPr/>
-        </p:nvSpPr>
-        <p:spPr>
-          <a:xfrm>
-            <a:off x="1051560" y="3977640"/>
-            <a:ext cx="2194560" cy="502920"/>
-          </a:xfrm>
-          <a:prstGeom prst="rect">
-            <a:avLst/>
-          </a:prstGeom>
-          <a:noFill/>
-          <a:ln/>
-        </p:spPr>
-        <p:txBody>
-          <a:bodyPr wrap="square" lIns="0" tIns="0" rIns="0" bIns="0" rtlCol="0" anchor="ctr"/>
-          <a:lstStyle/>
-          <a:p>
-            <a:pPr marL="0" indent="0">
-              <a:buNone/>
-            </a:pPr>
-            <a:r>
-              <a:rPr lang="en-US" sz="1100" dirty="0">
-                <a:solidFill>
-                  <a:srgbClr val="CCCCCC"/>
-                </a:solidFill>
-                <a:latin typeface="Calibri" pitchFamily="34" charset="0"/>
-                <a:ea typeface="Calibri" pitchFamily="34" charset="-122"/>
-                <a:cs typeface="Calibri" pitchFamily="34" charset="-120"/>
-              </a:rPr>
-              <a:t>Expand to low-cost, low-competition neighborhoods</a:t>
-            </a:r>
-            <a:endParaRPr lang="en-US" sz="1100" dirty="0"/>
-          </a:p>
-        </p:txBody>
-      </p:sp>
-      <p:sp>
-        <p:nvSpPr>
-          <p:cNvPr id="13" name="Shape 11"/>
-          <p:cNvSpPr/>
-          <p:nvPr/>
-        </p:nvSpPr>
-        <p:spPr>
-          <a:xfrm>
-            <a:off x="3383280" y="4023360"/>
-            <a:ext cx="411480" cy="411480"/>
-          </a:xfrm>
-          <a:prstGeom prst="ellipse">
-            <a:avLst/>
-          </a:prstGeom>
-          <a:solidFill>
-            <a:srgbClr val="B85042"/>
-          </a:solidFill>
-          <a:ln/>
-        </p:spPr>
-        <p:txBody>
-          <a:bodyPr/>
-          <a:lstStyle/>
-          <a:p>
-            <a:endParaRPr lang="en-KE"/>
-          </a:p>
-        </p:txBody>
-      </p:sp>
-      <p:sp>
-        <p:nvSpPr>
-          <p:cNvPr id="14" name="Text 12"/>
-          <p:cNvSpPr/>
-          <p:nvPr/>
-        </p:nvSpPr>
-        <p:spPr>
-          <a:xfrm>
-            <a:off x="3383280" y="4023360"/>
-            <a:ext cx="411480" cy="411480"/>
-          </a:xfrm>
-          <a:prstGeom prst="rect">
-            <a:avLst/>
-          </a:prstGeom>
-          <a:noFill/>
-          <a:ln/>
-        </p:spPr>
-        <p:txBody>
-          <a:bodyPr wrap="square" lIns="0" tIns="0" rIns="0" bIns="0" rtlCol="0" anchor="ctr"/>
-          <a:lstStyle/>
-          <a:p>
-            <a:pPr marL="0" indent="0" algn="ctr">
-              <a:buNone/>
-            </a:pPr>
-            <a:r>
-              <a:rPr lang="en-US" sz="1600" b="1" dirty="0">
-                <a:solidFill>
-                  <a:srgbClr val="FFFFFF"/>
-                </a:solidFill>
-                <a:latin typeface="Georgia" pitchFamily="34" charset="0"/>
-                <a:ea typeface="Georgia" pitchFamily="34" charset="-122"/>
-                <a:cs typeface="Georgia" pitchFamily="34" charset="-120"/>
-              </a:rPr>
-              <a:t>2</a:t>
-            </a:r>
-            <a:endParaRPr lang="en-US" sz="1600" dirty="0"/>
-          </a:p>
-        </p:txBody>
-      </p:sp>
-      <p:sp>
-        <p:nvSpPr>
-          <p:cNvPr id="15" name="Text 13"/>
-          <p:cNvSpPr/>
-          <p:nvPr/>
-        </p:nvSpPr>
-        <p:spPr>
-          <a:xfrm>
-            <a:off x="3886200" y="3977640"/>
-            <a:ext cx="2194560" cy="502920"/>
-          </a:xfrm>
-          <a:prstGeom prst="rect">
-            <a:avLst/>
-          </a:prstGeom>
-          <a:noFill/>
-          <a:ln/>
-        </p:spPr>
-        <p:txBody>
-          <a:bodyPr wrap="square" lIns="0" tIns="0" rIns="0" bIns="0" rtlCol="0" anchor="ctr"/>
-          <a:lstStyle/>
-          <a:p>
-            <a:pPr marL="0" indent="0">
-              <a:buNone/>
-            </a:pPr>
-            <a:r>
-              <a:rPr lang="en-US" sz="1100" dirty="0">
-                <a:solidFill>
-                  <a:srgbClr val="CCCCCC"/>
-                </a:solidFill>
-                <a:latin typeface="Calibri" pitchFamily="34" charset="0"/>
-                <a:ea typeface="Calibri" pitchFamily="34" charset="-122"/>
-                <a:cs typeface="Calibri" pitchFamily="34" charset="-120"/>
-              </a:rPr>
-              <a:t>Keep Eastleigh — it's profitable, growing, and loved by customers</a:t>
-            </a:r>
-            <a:endParaRPr lang="en-US" sz="1100" dirty="0"/>
-          </a:p>
-        </p:txBody>
-      </p:sp>
-      <p:sp>
-        <p:nvSpPr>
-          <p:cNvPr id="16" name="Shape 14"/>
-          <p:cNvSpPr/>
-          <p:nvPr/>
-        </p:nvSpPr>
-        <p:spPr>
-          <a:xfrm>
-            <a:off x="6217920" y="4023360"/>
-            <a:ext cx="411480" cy="411480"/>
-          </a:xfrm>
-          <a:prstGeom prst="ellipse">
-            <a:avLst/>
-          </a:prstGeom>
-          <a:solidFill>
-            <a:srgbClr val="B85042"/>
-          </a:solidFill>
-          <a:ln/>
-        </p:spPr>
-        <p:txBody>
-          <a:bodyPr/>
-          <a:lstStyle/>
-          <a:p>
-            <a:endParaRPr lang="en-KE"/>
-          </a:p>
-        </p:txBody>
-      </p:sp>
-      <p:sp>
-        <p:nvSpPr>
-          <p:cNvPr id="17" name="Text 15"/>
-          <p:cNvSpPr/>
-          <p:nvPr/>
-        </p:nvSpPr>
-        <p:spPr>
-          <a:xfrm>
-            <a:off x="6217920" y="4023360"/>
-            <a:ext cx="411480" cy="411480"/>
-          </a:xfrm>
-          <a:prstGeom prst="rect">
-            <a:avLst/>
-          </a:prstGeom>
-          <a:noFill/>
-          <a:ln/>
-        </p:spPr>
-        <p:txBody>
-          <a:bodyPr wrap="square" lIns="0" tIns="0" rIns="0" bIns="0" rtlCol="0" anchor="ctr"/>
-          <a:lstStyle/>
-          <a:p>
-            <a:pPr marL="0" indent="0" algn="ctr">
-              <a:buNone/>
-            </a:pPr>
-            <a:r>
-              <a:rPr lang="en-US" sz="1600" b="1" dirty="0">
-                <a:solidFill>
-                  <a:srgbClr val="FFFFFF"/>
-                </a:solidFill>
-                <a:latin typeface="Georgia" pitchFamily="34" charset="0"/>
-                <a:ea typeface="Georgia" pitchFamily="34" charset="-122"/>
-                <a:cs typeface="Georgia" pitchFamily="34" charset="-120"/>
-              </a:rPr>
-              <a:t>3</a:t>
-            </a:r>
-            <a:endParaRPr lang="en-US" sz="1600" dirty="0"/>
-          </a:p>
-        </p:txBody>
-      </p:sp>
-      <p:sp>
-        <p:nvSpPr>
-          <p:cNvPr id="18" name="Text 16"/>
-          <p:cNvSpPr/>
-          <p:nvPr/>
-        </p:nvSpPr>
-        <p:spPr>
-          <a:xfrm>
-            <a:off x="6720840" y="3977640"/>
-            <a:ext cx="2194560" cy="502920"/>
-          </a:xfrm>
-          <a:prstGeom prst="rect">
-            <a:avLst/>
-          </a:prstGeom>
-          <a:noFill/>
-          <a:ln/>
-        </p:spPr>
-        <p:txBody>
-          <a:bodyPr wrap="square" lIns="0" tIns="0" rIns="0" bIns="0" rtlCol="0" anchor="ctr"/>
-          <a:lstStyle/>
-          <a:p>
-            <a:pPr marL="0" indent="0">
-              <a:buNone/>
-            </a:pPr>
-            <a:r>
-              <a:rPr lang="en-US" sz="1100" dirty="0">
-                <a:solidFill>
-                  <a:srgbClr val="CCCCCC"/>
-                </a:solidFill>
-                <a:latin typeface="Calibri" pitchFamily="34" charset="0"/>
-                <a:ea typeface="Calibri" pitchFamily="34" charset="-122"/>
-                <a:cs typeface="Calibri" pitchFamily="34" charset="-120"/>
-              </a:rPr>
-              <a:t>Push high-efficiency menu items and test removing underperformers</a:t>
             </a:r>
             <a:endParaRPr lang="en-US" sz="1100" dirty="0"/>
           </a:p>
@@ -3373,7 +2539,7 @@
             <a:avLst/>
           </a:prstGeom>
           <a:solidFill>
-            <a:srgbClr val="4A9E6B"/>
+            <a:srgbClr val="B85042"/>
           </a:solidFill>
           <a:ln/>
         </p:spPr>
@@ -3385,30 +2551,6 @@
           </a:p>
         </p:txBody>
       </p:sp>
-      <p:pic>
-        <p:nvPicPr>
-          <p:cNvPr id="6" name="Image 0" descr="preencoded.png"/>
-          <p:cNvPicPr>
-            <a:picLocks noChangeAspect="1"/>
-          </p:cNvPicPr>
-          <p:nvPr/>
-        </p:nvPicPr>
-        <p:blipFill>
-          <a:blip r:embed="rId3"/>
-          <a:stretch>
-            <a:fillRect/>
-          </a:stretch>
-        </p:blipFill>
-        <p:spPr>
-          <a:xfrm>
-            <a:off x="822960" y="1783080"/>
-            <a:ext cx="411480" cy="411480"/>
-          </a:xfrm>
-          <a:prstGeom prst="rect">
-            <a:avLst/>
-          </a:prstGeom>
-        </p:spPr>
-      </p:pic>
       <p:sp>
         <p:nvSpPr>
           <p:cNvPr id="7" name="Text 4"/>
@@ -3417,7 +2559,7 @@
         </p:nvSpPr>
         <p:spPr>
           <a:xfrm>
-            <a:off x="1463040" y="1645920"/>
+            <a:off x="937260" y="1699261"/>
             <a:ext cx="6858000" cy="365760"/>
           </a:xfrm>
           <a:prstGeom prst="rect">
@@ -3456,7 +2598,7 @@
         </p:nvSpPr>
         <p:spPr>
           <a:xfrm>
-            <a:off x="1463040" y="2011680"/>
+            <a:off x="960120" y="2065021"/>
             <a:ext cx="6858000" cy="365760"/>
           </a:xfrm>
           <a:prstGeom prst="rect">
@@ -3495,7 +2637,7 @@
         </p:nvSpPr>
         <p:spPr>
           <a:xfrm>
-            <a:off x="548640" y="2651760"/>
+            <a:off x="548640" y="2674621"/>
             <a:ext cx="8046720" cy="914400"/>
           </a:xfrm>
           <a:prstGeom prst="rect">
@@ -3548,30 +2690,6 @@
           </a:p>
         </p:txBody>
       </p:sp>
-      <p:pic>
-        <p:nvPicPr>
-          <p:cNvPr id="11" name="Image 1" descr="preencoded.png"/>
-          <p:cNvPicPr>
-            <a:picLocks noChangeAspect="1"/>
-          </p:cNvPicPr>
-          <p:nvPr/>
-        </p:nvPicPr>
-        <p:blipFill>
-          <a:blip r:embed="rId4"/>
-          <a:stretch>
-            <a:fillRect/>
-          </a:stretch>
-        </p:blipFill>
-        <p:spPr>
-          <a:xfrm>
-            <a:off x="822960" y="2880360"/>
-            <a:ext cx="411480" cy="411480"/>
-          </a:xfrm>
-          <a:prstGeom prst="rect">
-            <a:avLst/>
-          </a:prstGeom>
-        </p:spPr>
-      </p:pic>
       <p:sp>
         <p:nvSpPr>
           <p:cNvPr id="12" name="Text 8"/>
@@ -3580,7 +2698,7 @@
         </p:nvSpPr>
         <p:spPr>
           <a:xfrm>
-            <a:off x="1463040" y="2743200"/>
+            <a:off x="914400" y="2766061"/>
             <a:ext cx="6858000" cy="365760"/>
           </a:xfrm>
           <a:prstGeom prst="rect">
@@ -3619,7 +2737,7 @@
         </p:nvSpPr>
         <p:spPr>
           <a:xfrm>
-            <a:off x="1463040" y="3108960"/>
+            <a:off x="914400" y="3131821"/>
             <a:ext cx="6858000" cy="365760"/>
           </a:xfrm>
           <a:prstGeom prst="rect">
@@ -3699,7 +2817,7 @@
             <a:avLst/>
           </a:prstGeom>
           <a:solidFill>
-            <a:srgbClr val="4A7C6F"/>
+            <a:srgbClr val="B85042"/>
           </a:solidFill>
           <a:ln/>
         </p:spPr>
@@ -3711,30 +2829,6 @@
           </a:p>
         </p:txBody>
       </p:sp>
-      <p:pic>
-        <p:nvPicPr>
-          <p:cNvPr id="16" name="Image 2" descr="preencoded.png"/>
-          <p:cNvPicPr>
-            <a:picLocks noChangeAspect="1"/>
-          </p:cNvPicPr>
-          <p:nvPr/>
-        </p:nvPicPr>
-        <p:blipFill>
-          <a:blip r:embed="rId5"/>
-          <a:stretch>
-            <a:fillRect/>
-          </a:stretch>
-        </p:blipFill>
-        <p:spPr>
-          <a:xfrm>
-            <a:off x="822960" y="3977640"/>
-            <a:ext cx="411480" cy="411480"/>
-          </a:xfrm>
-          <a:prstGeom prst="rect">
-            <a:avLst/>
-          </a:prstGeom>
-        </p:spPr>
-      </p:pic>
       <p:sp>
         <p:nvSpPr>
           <p:cNvPr id="17" name="Text 12"/>
@@ -3743,7 +2837,7 @@
         </p:nvSpPr>
         <p:spPr>
           <a:xfrm>
-            <a:off x="1463040" y="3840480"/>
+            <a:off x="937260" y="3840480"/>
             <a:ext cx="6858000" cy="365760"/>
           </a:xfrm>
           <a:prstGeom prst="rect">
@@ -3782,7 +2876,7 @@
         </p:nvSpPr>
         <p:spPr>
           <a:xfrm>
-            <a:off x="1463040" y="4206240"/>
+            <a:off x="937260" y="4206240"/>
             <a:ext cx="6858000" cy="365760"/>
           </a:xfrm>
           <a:prstGeom prst="rect">
@@ -5421,10 +4515,7 @@
               <a:buNone/>
             </a:pPr>
             <a:r>
-              <a:rPr lang="en-US" sz="1300" b="1" i="1" dirty="0">
-                <a:solidFill>
-                  <a:srgbClr val="B85042"/>
-                </a:solidFill>
+              <a:rPr lang="en-US" sz="1300" dirty="0">
                 <a:latin typeface="Calibri" pitchFamily="34" charset="0"/>
                 <a:ea typeface="Calibri" pitchFamily="34" charset="-122"/>
                 <a:cs typeface="Calibri" pitchFamily="34" charset="-120"/>
@@ -7807,7 +6898,7 @@
                 <a:ea typeface="Calibri" pitchFamily="34" charset="-122"/>
                 <a:cs typeface="Calibri" pitchFamily="34" charset="-120"/>
               </a:rPr>
-              <a:t>Avoid "Westlands-type" markets — high rent and crowded competition compress margins despite decent revenue.</a:t>
+              <a:t>Avoid "Westlands-type" markets:  high rent and crowded competition compress margins despite decent revenue.</a:t>
             </a:r>
             <a:endParaRPr lang="en-US" sz="1100" dirty="0"/>
           </a:p>
@@ -7961,10 +7052,7 @@
               <a:buNone/>
             </a:pPr>
             <a:r>
-              <a:rPr lang="en-US" sz="1500" i="1" dirty="0">
-                <a:solidFill>
-                  <a:srgbClr val="7A7A7A"/>
-                </a:solidFill>
+              <a:rPr lang="en-US" sz="1500" dirty="0">
                 <a:latin typeface="Calibri" pitchFamily="34" charset="0"/>
                 <a:ea typeface="Calibri" pitchFamily="34" charset="-122"/>
                 <a:cs typeface="Calibri" pitchFamily="34" charset="-120"/>
@@ -8879,15 +7967,12 @@
               <a:buNone/>
             </a:pPr>
             <a:r>
-              <a:rPr lang="en-US" sz="1200" b="1" i="1" dirty="0">
-                <a:solidFill>
-                  <a:srgbClr val="B85042"/>
-                </a:solidFill>
+              <a:rPr lang="en-US" sz="1200" b="1" dirty="0">
                 <a:latin typeface="Calibri" pitchFamily="34" charset="0"/>
                 <a:ea typeface="Calibri" pitchFamily="34" charset="-122"/>
                 <a:cs typeface="Calibri" pitchFamily="34" charset="-120"/>
               </a:rPr>
-              <a:t>Verdict: The GM is right. Eastleigh is more profitable than Westlands and growing.</a:t>
+              <a:t>Verdict: Eastleigh is more profitable than Westlands and growing.</a:t>
             </a:r>
             <a:endParaRPr lang="en-US" sz="1200" dirty="0"/>
           </a:p>
@@ -11892,7 +10977,7 @@
             <a:avLst/>
           </a:prstGeom>
           <a:solidFill>
-            <a:srgbClr val="4A9E6B"/>
+            <a:srgbClr val="B85042"/>
           </a:solidFill>
           <a:ln/>
         </p:spPr>
@@ -12031,7 +11116,7 @@
             <a:avLst/>
           </a:prstGeom>
           <a:solidFill>
-            <a:srgbClr val="4A9E6B"/>
+            <a:srgbClr val="B85042"/>
           </a:solidFill>
           <a:ln/>
         </p:spPr>
@@ -12170,7 +11255,7 @@
             <a:avLst/>
           </a:prstGeom>
           <a:solidFill>
-            <a:srgbClr val="C0392B"/>
+            <a:srgbClr val="B85042"/>
           </a:solidFill>
           <a:ln/>
         </p:spPr>
@@ -17798,10 +16883,7 @@
               <a:buNone/>
             </a:pPr>
             <a:r>
-              <a:rPr lang="en-US" sz="1000" i="1" dirty="0">
-                <a:solidFill>
-                  <a:srgbClr val="7A7A7A"/>
-                </a:solidFill>
+              <a:rPr lang="en-US" sz="1000" dirty="0">
                 <a:latin typeface="Calibri" pitchFamily="34" charset="0"/>
                 <a:ea typeface="Calibri" pitchFamily="34" charset="-122"/>
                 <a:cs typeface="Calibri" pitchFamily="34" charset="-120"/>
@@ -17960,7 +17042,7 @@
             <a:avLst/>
           </a:prstGeom>
           <a:solidFill>
-            <a:srgbClr val="4A9E6B"/>
+            <a:srgbClr val="B85042"/>
           </a:solidFill>
           <a:ln/>
         </p:spPr>
@@ -18316,7 +17398,7 @@
             <a:avLst/>
           </a:prstGeom>
           <a:solidFill>
-            <a:srgbClr val="C0392B"/>
+            <a:srgbClr val="B85042"/>
           </a:solidFill>
           <a:ln/>
         </p:spPr>
